--- a/classes/parte-14-grc-riesgo-y-cumplimiento/278-iso-iec-27001-e-implantacion-de-un-sgsi/clase-278-presentacion.pptx
+++ b/classes/parte-14-grc-riesgo-y-cumplimiento/278-iso-iec-27001-e-implantacion-de-un-sgsi/clase-278-presentacion.pptx
@@ -17,6 +17,10 @@
     <p:sldId id="265" r:id="rId16"/>
     <p:sldId id="266" r:id="rId17"/>
     <p:sldId id="267" r:id="rId18"/>
+    <p:sldId id="268" r:id="rId19"/>
+    <p:sldId id="269" r:id="rId20"/>
+    <p:sldId id="270" r:id="rId21"/>
+    <p:sldId id="271" r:id="rId22"/>
   </p:sldIdLst>
   <p:sldSz cx="9144000" cy="6858000" type="screen4x3"/>
   <p:notesSz cx="6858000" cy="9144000"/>
@@ -3198,7 +3202,7 @@
                   <a:srgbClr val="0B3D2E"/>
                 </a:solidFill>
               </a:rPr>
-              <a:t>⚠️ Errores comunes</a:t>
+              <a:t>🧪 Laboratorio guiado (ejercicio aplicado)</a:t>
             </a:r>
           </a:p>
         </p:txBody>
@@ -3236,67 +3240,97 @@
                   <a:srgbClr val="22282E"/>
                 </a:solidFill>
               </a:rPr>
-              <a:t>•  SoA con controles marcados sin justificar — El auditor lo rechaza; añade justificación por control</a:t>
-            </a:r>
-          </a:p>
-          <a:p>
-            <a:pPr>
-              <a:spcAft>
-                <a:spcPts val="600"/>
-              </a:spcAft>
-            </a:pPr>
-            <a:r>
-              <a:rPr sz="1500">
-                <a:solidFill>
-                  <a:srgbClr val="22282E"/>
-                </a:solidFill>
-              </a:rPr>
-              <a:t>•  Alcance demasiado amplio o vago — Certificación inviable; delimita alcance concreto y realista</a:t>
-            </a:r>
-          </a:p>
-          <a:p>
-            <a:pPr>
-              <a:spcAft>
-                <a:spcPts val="600"/>
-              </a:spcAft>
-            </a:pPr>
-            <a:r>
-              <a:rPr sz="1500">
-                <a:solidFill>
-                  <a:srgbClr val="22282E"/>
-                </a:solidFill>
-              </a:rPr>
-              <a:t>•  Confundir certificar la empresa con certificar un producto — Se certifica el SGSI dentro de un alcance, no un producto</a:t>
-            </a:r>
-          </a:p>
-          <a:p>
-            <a:pPr>
-              <a:spcAft>
-                <a:spcPts val="600"/>
-              </a:spcAft>
-            </a:pPr>
-            <a:r>
-              <a:rPr sz="1500">
-                <a:solidFill>
-                  <a:srgbClr val="22282E"/>
-                </a:solidFill>
-              </a:rPr>
-              <a:t>•  Riesgos sin dueño ni tratamiento — Incumple cláusula 6; asigna propietario y decisión</a:t>
-            </a:r>
-          </a:p>
-          <a:p>
-            <a:pPr>
-              <a:spcAft>
-                <a:spcPts val="600"/>
-              </a:spcAft>
-            </a:pPr>
-            <a:r>
-              <a:rPr sz="1500">
-                <a:solidFill>
-                  <a:srgbClr val="22282E"/>
-                </a:solidFill>
-              </a:rPr>
-              <a:t>•  Documentar todo pero no operarlo — El auditor busca evidencia de ejecución, no solo papeles</a:t>
+              <a:t>•  Vas a preparar los documentos núcleo del SGSI de "Ferretería del Sur S.A.".</a:t>
+            </a:r>
+          </a:p>
+          <a:p>
+            <a:pPr>
+              <a:spcAft>
+                <a:spcPts val="600"/>
+              </a:spcAft>
+            </a:pPr>
+            <a:r>
+              <a:rPr sz="1500">
+                <a:solidFill>
+                  <a:srgbClr val="22282E"/>
+                </a:solidFill>
+              </a:rPr>
+              <a:t>•  Alcance: redacta en un párrafo el alcance del SGSI (p. ej. "la plataforma de e-commerce, su infraestructura cloud y el proceso de pagos"). Indica qué queda fuera.</a:t>
+            </a:r>
+          </a:p>
+          <a:p>
+            <a:pPr>
+              <a:spcAft>
+                <a:spcPts val="600"/>
+              </a:spcAft>
+            </a:pPr>
+            <a:r>
+              <a:rPr sz="1500">
+                <a:solidFill>
+                  <a:srgbClr val="22282E"/>
+                </a:solidFill>
+              </a:rPr>
+              <a:t>•  Contexto y partes interesadas (cláusula 4): lista 5 partes interesadas (clientes, banco adquirente, reguladores, empleados, proveedores cloud) y sus expectativas de seguridad.</a:t>
+            </a:r>
+          </a:p>
+          <a:p>
+            <a:pPr>
+              <a:spcAft>
+                <a:spcPts val="600"/>
+              </a:spcAft>
+            </a:pPr>
+            <a:r>
+              <a:rPr sz="1500">
+                <a:solidFill>
+                  <a:srgbClr val="22282E"/>
+                </a:solidFill>
+              </a:rPr>
+              <a:t>•  Liderazgo (cláusula 5): redacta el compromiso de dirección en 3 frases y asigna el propietario del SGSI.</a:t>
+            </a:r>
+          </a:p>
+          <a:p>
+            <a:pPr>
+              <a:spcAft>
+                <a:spcPts val="600"/>
+              </a:spcAft>
+            </a:pPr>
+            <a:r>
+              <a:rPr sz="1500">
+                <a:solidFill>
+                  <a:srgbClr val="22282E"/>
+                </a:solidFill>
+              </a:rPr>
+              <a:t>•  Registro de riesgos (cláusula 6): reutiliza los 3 riesgos de la clase 277 en una hoja con: activo, amenaza, probabilidad, impacto, nivel y tratamiento.</a:t>
+            </a:r>
+          </a:p>
+          <a:p>
+            <a:pPr>
+              <a:spcAft>
+                <a:spcPts val="600"/>
+              </a:spcAft>
+            </a:pPr>
+            <a:r>
+              <a:rPr sz="1500">
+                <a:solidFill>
+                  <a:srgbClr val="22282E"/>
+                </a:solidFill>
+              </a:rPr>
+              <a:t>•  Selección de controles: para cada riesgo, elige controles del Anexo A (p. ej. A.5.7 Inteligencia de amenazas, A.8.7 Protección contra malware, A.8.13 Copias de seguridad).</a:t>
+            </a:r>
+          </a:p>
+          <a:p>
+            <a:pPr>
+              <a:spcAft>
+                <a:spcPts val="600"/>
+              </a:spcAft>
+            </a:pPr>
+            <a:r>
+              <a:rPr sz="1500">
+                <a:solidFill>
+                  <a:srgbClr val="22282E"/>
+                </a:solidFill>
+              </a:rPr>
+              <a:t>•  Declaración de Aplicabilidad: crea una hoja con las columnas: control, aplica (Sí/No), justificación, estado de implementación. Rellena al menos 15 controles, incluyendo alguna exclusión justificada…</a:t>
             </a:r>
           </a:p>
         </p:txBody>
@@ -3347,7 +3381,7 @@
                   <a:srgbClr val="0B3D2E"/>
                 </a:solidFill>
               </a:rPr>
-              <a:t>❓ Preguntas frecuentes</a:t>
+              <a:t>✍️ Ejercicios</a:t>
             </a:r>
           </a:p>
         </p:txBody>
@@ -3385,97 +3419,82 @@
                   <a:srgbClr val="22282E"/>
                 </a:solidFill>
               </a:rPr>
-              <a:t>•  ❓ ¿Cuánto se tarda en certificar?</a:t>
-            </a:r>
-          </a:p>
-          <a:p>
-            <a:pPr>
-              <a:spcAft>
-                <a:spcPts val="600"/>
-              </a:spcAft>
-            </a:pPr>
-            <a:r>
-              <a:rPr sz="1500">
-                <a:solidFill>
-                  <a:srgbClr val="22282E"/>
-                </a:solidFill>
-              </a:rPr>
-              <a:t>•  Típicamente 6–12 meses para una PYME, según madurez previa. La auditoría tiene etapa 1 (documental) y etapa 2 (implementación).</a:t>
-            </a:r>
-          </a:p>
-          <a:p>
-            <a:pPr>
-              <a:spcAft>
-                <a:spcPts val="600"/>
-              </a:spcAft>
-            </a:pPr>
-            <a:r>
-              <a:rPr sz="1500">
-                <a:solidFill>
-                  <a:srgbClr val="22282E"/>
-                </a:solidFill>
-              </a:rPr>
-              <a:t>•  ❓ ¿27001:2022 obliga a los 93 controles?</a:t>
-            </a:r>
-          </a:p>
-          <a:p>
-            <a:pPr>
-              <a:spcAft>
-                <a:spcPts val="600"/>
-              </a:spcAft>
-            </a:pPr>
-            <a:r>
-              <a:rPr sz="1500">
-                <a:solidFill>
-                  <a:srgbClr val="22282E"/>
-                </a:solidFill>
-              </a:rPr>
-              <a:t>•  No. Aplicas los que tu análisis de riesgo justifique; el resto se excluye con motivo en el SoA.</a:t>
-            </a:r>
-          </a:p>
-          <a:p>
-            <a:pPr>
-              <a:spcAft>
-                <a:spcPts val="600"/>
-              </a:spcAft>
-            </a:pPr>
-            <a:r>
-              <a:rPr sz="1500">
-                <a:solidFill>
-                  <a:srgbClr val="22282E"/>
-                </a:solidFill>
-              </a:rPr>
-              <a:t>•  ❓ ¿ISO 27001 cubre GDPR?</a:t>
-            </a:r>
-          </a:p>
-          <a:p>
-            <a:pPr>
-              <a:spcAft>
-                <a:spcPts val="600"/>
-              </a:spcAft>
-            </a:pPr>
-            <a:r>
-              <a:rPr sz="1500">
-                <a:solidFill>
-                  <a:srgbClr val="22282E"/>
-                </a:solidFill>
-              </a:rPr>
-              <a:t>•  Ayuda, pero no basta. Para privacidad se complementa con ISO/IEC 27701 y con el propio GDPR (clase 281 y 289).</a:t>
-            </a:r>
-          </a:p>
-          <a:p>
-            <a:pPr>
-              <a:spcAft>
-                <a:spcPts val="600"/>
-              </a:spcAft>
-            </a:pPr>
-            <a:r>
-              <a:rPr sz="1500">
-                <a:solidFill>
-                  <a:srgbClr val="22282E"/>
-                </a:solidFill>
-              </a:rPr>
-              <a:t>•  ❓ ¿Cada cuánto se re-audita?</a:t>
+              <a:t>•  Explica la diferencia entre ISO 27001 e ISO 27002.</a:t>
+            </a:r>
+          </a:p>
+          <a:p>
+            <a:pPr>
+              <a:spcAft>
+                <a:spcPts val="600"/>
+              </a:spcAft>
+            </a:pPr>
+            <a:r>
+              <a:rPr sz="1500">
+                <a:solidFill>
+                  <a:srgbClr val="22282E"/>
+                </a:solidFill>
+              </a:rPr>
+              <a:t>•  ¿Por qué el SoA es obligatorio y qué pasa si excluyes un control sin justificarlo?</a:t>
+            </a:r>
+          </a:p>
+          <a:p>
+            <a:pPr>
+              <a:spcAft>
+                <a:spcPts val="600"/>
+              </a:spcAft>
+            </a:pPr>
+            <a:r>
+              <a:rPr sz="1500">
+                <a:solidFill>
+                  <a:srgbClr val="22282E"/>
+                </a:solidFill>
+              </a:rPr>
+              <a:t>•  Mapea estos riesgos a controles del Anexo A: phishing, pérdida de laptop, acceso no revocado a un ex-empleado.</a:t>
+            </a:r>
+          </a:p>
+          <a:p>
+            <a:pPr>
+              <a:spcAft>
+                <a:spcPts val="600"/>
+              </a:spcAft>
+            </a:pPr>
+            <a:r>
+              <a:rPr sz="1500">
+                <a:solidFill>
+                  <a:srgbClr val="22282E"/>
+                </a:solidFill>
+              </a:rPr>
+              <a:t>•  Redacta una política de seguridad de la información conforme a la cláusula 5.2 (máx. 15 líneas).</a:t>
+            </a:r>
+          </a:p>
+          <a:p>
+            <a:pPr>
+              <a:spcAft>
+                <a:spcPts val="600"/>
+              </a:spcAft>
+            </a:pPr>
+            <a:r>
+              <a:rPr sz="1500">
+                <a:solidFill>
+                  <a:srgbClr val="22282E"/>
+                </a:solidFill>
+              </a:rPr>
+              <a:t>•  Distingue una no conformidad mayor de una menor con un ejemplo de cada.</a:t>
+            </a:r>
+          </a:p>
+          <a:p>
+            <a:pPr>
+              <a:spcAft>
+                <a:spcPts val="600"/>
+              </a:spcAft>
+            </a:pPr>
+            <a:r>
+              <a:rPr sz="1500">
+                <a:solidFill>
+                  <a:srgbClr val="22282E"/>
+                </a:solidFill>
+              </a:rPr>
+              <a:t>•  Describe qué se revisa en la etapa 1 vs. la etapa 2 de la auditoría de certificación.</a:t>
             </a:r>
           </a:p>
         </p:txBody>
@@ -3526,7 +3545,7 @@
                   <a:srgbClr val="0B3D2E"/>
                 </a:solidFill>
               </a:rPr>
-              <a:t>🔗 Referencias</a:t>
+              <a:t>📝 Reto verificable</a:t>
             </a:r>
           </a:p>
         </p:txBody>
@@ -3564,6 +3583,438 @@
                   <a:srgbClr val="22282E"/>
                 </a:solidFill>
               </a:rPr>
+              <a:t>•  Entrega una Declaración de Aplicabilidad (SoA) con al menos 20 controles del Anexo A:2022, cada uno marcado como aplicable/no aplicable, con justificación y estado, acompañada del registro de riesgos…</a:t>
+            </a:r>
+          </a:p>
+          <a:p>
+            <a:pPr>
+              <a:spcAft>
+                <a:spcPts val="600"/>
+              </a:spcAft>
+            </a:pPr>
+            <a:r>
+              <a:rPr sz="1500">
+                <a:solidFill>
+                  <a:srgbClr val="22282E"/>
+                </a:solidFill>
+              </a:rPr>
+              <a:t>•  Criterio de aceptación: cada control incluye justificación (no solo "Sí/No"), hay al menos una exclusión razonada, y cada control aplicable está trazado a un riesgo del registro.</a:t>
+            </a:r>
+          </a:p>
+        </p:txBody>
+      </p:sp>
+    </p:spTree>
+  </p:cSld>
+  <p:clrMapOvr>
+    <a:masterClrMapping/>
+  </p:clrMapOvr>
+</p:sld>
+</file>
+
+<file path=ppt/slides/slide13.xml><?xml version="1.0" encoding="utf-8"?>
+<p:sld xmlns:a="http://schemas.openxmlformats.org/drawingml/2006/main" xmlns:p="http://schemas.openxmlformats.org/presentationml/2006/main" xmlns:r="http://schemas.openxmlformats.org/officeDocument/2006/relationships">
+  <p:cSld>
+    <p:spTree>
+      <p:nvGrpSpPr>
+        <p:cNvPr id="1" name=""/>
+        <p:cNvGrpSpPr/>
+        <p:nvPr/>
+      </p:nvGrpSpPr>
+      <p:grpSpPr/>
+      <p:sp>
+        <p:nvSpPr>
+          <p:cNvPr id="2" name="TextBox 1"/>
+          <p:cNvSpPr txBox="1"/>
+          <p:nvPr/>
+        </p:nvSpPr>
+        <p:spPr>
+          <a:xfrm>
+            <a:off x="457200" y="320040"/>
+            <a:ext cx="8229600" cy="822960"/>
+          </a:xfrm>
+          <a:prstGeom prst="rect">
+            <a:avLst/>
+          </a:prstGeom>
+          <a:noFill/>
+        </p:spPr>
+        <p:txBody>
+          <a:bodyPr wrap="square">
+            <a:spAutoFit/>
+          </a:bodyPr>
+          <a:lstStyle/>
+          <a:p>
+            <a:r>
+              <a:rPr sz="2600" b="1">
+                <a:solidFill>
+                  <a:srgbClr val="0B3D2E"/>
+                </a:solidFill>
+              </a:rPr>
+              <a:t>⚠️ Errores comunes</a:t>
+            </a:r>
+          </a:p>
+        </p:txBody>
+      </p:sp>
+      <p:sp>
+        <p:nvSpPr>
+          <p:cNvPr id="3" name="TextBox 2"/>
+          <p:cNvSpPr txBox="1"/>
+          <p:nvPr/>
+        </p:nvSpPr>
+        <p:spPr>
+          <a:xfrm>
+            <a:off x="457200" y="1280160"/>
+            <a:ext cx="8229600" cy="4937760"/>
+          </a:xfrm>
+          <a:prstGeom prst="rect">
+            <a:avLst/>
+          </a:prstGeom>
+          <a:noFill/>
+        </p:spPr>
+        <p:txBody>
+          <a:bodyPr wrap="square">
+            <a:spAutoFit/>
+          </a:bodyPr>
+          <a:lstStyle/>
+          <a:p>
+            <a:pPr>
+              <a:spcAft>
+                <a:spcPts val="600"/>
+              </a:spcAft>
+            </a:pPr>
+            <a:r>
+              <a:rPr sz="1500">
+                <a:solidFill>
+                  <a:srgbClr val="22282E"/>
+                </a:solidFill>
+              </a:rPr>
+              <a:t>•  SoA con controles marcados sin justificar — El auditor lo rechaza; añade justificación por control</a:t>
+            </a:r>
+          </a:p>
+          <a:p>
+            <a:pPr>
+              <a:spcAft>
+                <a:spcPts val="600"/>
+              </a:spcAft>
+            </a:pPr>
+            <a:r>
+              <a:rPr sz="1500">
+                <a:solidFill>
+                  <a:srgbClr val="22282E"/>
+                </a:solidFill>
+              </a:rPr>
+              <a:t>•  Alcance demasiado amplio o vago — Certificación inviable; delimita alcance concreto y realista</a:t>
+            </a:r>
+          </a:p>
+          <a:p>
+            <a:pPr>
+              <a:spcAft>
+                <a:spcPts val="600"/>
+              </a:spcAft>
+            </a:pPr>
+            <a:r>
+              <a:rPr sz="1500">
+                <a:solidFill>
+                  <a:srgbClr val="22282E"/>
+                </a:solidFill>
+              </a:rPr>
+              <a:t>•  Confundir certificar la empresa con certificar un producto — Se certifica el SGSI dentro de un alcance, no un producto</a:t>
+            </a:r>
+          </a:p>
+          <a:p>
+            <a:pPr>
+              <a:spcAft>
+                <a:spcPts val="600"/>
+              </a:spcAft>
+            </a:pPr>
+            <a:r>
+              <a:rPr sz="1500">
+                <a:solidFill>
+                  <a:srgbClr val="22282E"/>
+                </a:solidFill>
+              </a:rPr>
+              <a:t>•  Riesgos sin dueño ni tratamiento — Incumple cláusula 6; asigna propietario y decisión</a:t>
+            </a:r>
+          </a:p>
+          <a:p>
+            <a:pPr>
+              <a:spcAft>
+                <a:spcPts val="600"/>
+              </a:spcAft>
+            </a:pPr>
+            <a:r>
+              <a:rPr sz="1500">
+                <a:solidFill>
+                  <a:srgbClr val="22282E"/>
+                </a:solidFill>
+              </a:rPr>
+              <a:t>•  Documentar todo pero no operarlo — El auditor busca evidencia de ejecución, no solo papeles</a:t>
+            </a:r>
+          </a:p>
+        </p:txBody>
+      </p:sp>
+    </p:spTree>
+  </p:cSld>
+  <p:clrMapOvr>
+    <a:masterClrMapping/>
+  </p:clrMapOvr>
+</p:sld>
+</file>
+
+<file path=ppt/slides/slide14.xml><?xml version="1.0" encoding="utf-8"?>
+<p:sld xmlns:a="http://schemas.openxmlformats.org/drawingml/2006/main" xmlns:p="http://schemas.openxmlformats.org/presentationml/2006/main" xmlns:r="http://schemas.openxmlformats.org/officeDocument/2006/relationships">
+  <p:cSld>
+    <p:spTree>
+      <p:nvGrpSpPr>
+        <p:cNvPr id="1" name=""/>
+        <p:cNvGrpSpPr/>
+        <p:nvPr/>
+      </p:nvGrpSpPr>
+      <p:grpSpPr/>
+      <p:sp>
+        <p:nvSpPr>
+          <p:cNvPr id="2" name="TextBox 1"/>
+          <p:cNvSpPr txBox="1"/>
+          <p:nvPr/>
+        </p:nvSpPr>
+        <p:spPr>
+          <a:xfrm>
+            <a:off x="457200" y="320040"/>
+            <a:ext cx="8229600" cy="822960"/>
+          </a:xfrm>
+          <a:prstGeom prst="rect">
+            <a:avLst/>
+          </a:prstGeom>
+          <a:noFill/>
+        </p:spPr>
+        <p:txBody>
+          <a:bodyPr wrap="square">
+            <a:spAutoFit/>
+          </a:bodyPr>
+          <a:lstStyle/>
+          <a:p>
+            <a:r>
+              <a:rPr sz="2600" b="1">
+                <a:solidFill>
+                  <a:srgbClr val="0B3D2E"/>
+                </a:solidFill>
+              </a:rPr>
+              <a:t>❓ Preguntas frecuentes</a:t>
+            </a:r>
+          </a:p>
+        </p:txBody>
+      </p:sp>
+      <p:sp>
+        <p:nvSpPr>
+          <p:cNvPr id="3" name="TextBox 2"/>
+          <p:cNvSpPr txBox="1"/>
+          <p:nvPr/>
+        </p:nvSpPr>
+        <p:spPr>
+          <a:xfrm>
+            <a:off x="457200" y="1280160"/>
+            <a:ext cx="8229600" cy="4937760"/>
+          </a:xfrm>
+          <a:prstGeom prst="rect">
+            <a:avLst/>
+          </a:prstGeom>
+          <a:noFill/>
+        </p:spPr>
+        <p:txBody>
+          <a:bodyPr wrap="square">
+            <a:spAutoFit/>
+          </a:bodyPr>
+          <a:lstStyle/>
+          <a:p>
+            <a:pPr>
+              <a:spcAft>
+                <a:spcPts val="600"/>
+              </a:spcAft>
+            </a:pPr>
+            <a:r>
+              <a:rPr sz="1500">
+                <a:solidFill>
+                  <a:srgbClr val="22282E"/>
+                </a:solidFill>
+              </a:rPr>
+              <a:t>•  ❓ ¿Cuánto se tarda en certificar?</a:t>
+            </a:r>
+          </a:p>
+          <a:p>
+            <a:pPr>
+              <a:spcAft>
+                <a:spcPts val="600"/>
+              </a:spcAft>
+            </a:pPr>
+            <a:r>
+              <a:rPr sz="1500">
+                <a:solidFill>
+                  <a:srgbClr val="22282E"/>
+                </a:solidFill>
+              </a:rPr>
+              <a:t>•  Típicamente 6–12 meses para una PYME, según madurez previa. La auditoría tiene etapa 1 (documental) y etapa 2 (implementación).</a:t>
+            </a:r>
+          </a:p>
+          <a:p>
+            <a:pPr>
+              <a:spcAft>
+                <a:spcPts val="600"/>
+              </a:spcAft>
+            </a:pPr>
+            <a:r>
+              <a:rPr sz="1500">
+                <a:solidFill>
+                  <a:srgbClr val="22282E"/>
+                </a:solidFill>
+              </a:rPr>
+              <a:t>•  ❓ ¿27001:2022 obliga a los 93 controles?</a:t>
+            </a:r>
+          </a:p>
+          <a:p>
+            <a:pPr>
+              <a:spcAft>
+                <a:spcPts val="600"/>
+              </a:spcAft>
+            </a:pPr>
+            <a:r>
+              <a:rPr sz="1500">
+                <a:solidFill>
+                  <a:srgbClr val="22282E"/>
+                </a:solidFill>
+              </a:rPr>
+              <a:t>•  No. Aplicas los que tu análisis de riesgo justifique; el resto se excluye con motivo en el SoA.</a:t>
+            </a:r>
+          </a:p>
+          <a:p>
+            <a:pPr>
+              <a:spcAft>
+                <a:spcPts val="600"/>
+              </a:spcAft>
+            </a:pPr>
+            <a:r>
+              <a:rPr sz="1500">
+                <a:solidFill>
+                  <a:srgbClr val="22282E"/>
+                </a:solidFill>
+              </a:rPr>
+              <a:t>•  ❓ ¿ISO 27001 cubre GDPR?</a:t>
+            </a:r>
+          </a:p>
+          <a:p>
+            <a:pPr>
+              <a:spcAft>
+                <a:spcPts val="600"/>
+              </a:spcAft>
+            </a:pPr>
+            <a:r>
+              <a:rPr sz="1500">
+                <a:solidFill>
+                  <a:srgbClr val="22282E"/>
+                </a:solidFill>
+              </a:rPr>
+              <a:t>•  Ayuda, pero no basta. Para privacidad se complementa con ISO/IEC 27701 y con el propio GDPR (clase 281 y 289).</a:t>
+            </a:r>
+          </a:p>
+          <a:p>
+            <a:pPr>
+              <a:spcAft>
+                <a:spcPts val="600"/>
+              </a:spcAft>
+            </a:pPr>
+            <a:r>
+              <a:rPr sz="1500">
+                <a:solidFill>
+                  <a:srgbClr val="22282E"/>
+                </a:solidFill>
+              </a:rPr>
+              <a:t>•  ❓ ¿Cada cuánto se re-audita?</a:t>
+            </a:r>
+          </a:p>
+        </p:txBody>
+      </p:sp>
+    </p:spTree>
+  </p:cSld>
+  <p:clrMapOvr>
+    <a:masterClrMapping/>
+  </p:clrMapOvr>
+</p:sld>
+</file>
+
+<file path=ppt/slides/slide15.xml><?xml version="1.0" encoding="utf-8"?>
+<p:sld xmlns:a="http://schemas.openxmlformats.org/drawingml/2006/main" xmlns:p="http://schemas.openxmlformats.org/presentationml/2006/main" xmlns:r="http://schemas.openxmlformats.org/officeDocument/2006/relationships">
+  <p:cSld>
+    <p:spTree>
+      <p:nvGrpSpPr>
+        <p:cNvPr id="1" name=""/>
+        <p:cNvGrpSpPr/>
+        <p:nvPr/>
+      </p:nvGrpSpPr>
+      <p:grpSpPr/>
+      <p:sp>
+        <p:nvSpPr>
+          <p:cNvPr id="2" name="TextBox 1"/>
+          <p:cNvSpPr txBox="1"/>
+          <p:nvPr/>
+        </p:nvSpPr>
+        <p:spPr>
+          <a:xfrm>
+            <a:off x="457200" y="320040"/>
+            <a:ext cx="8229600" cy="822960"/>
+          </a:xfrm>
+          <a:prstGeom prst="rect">
+            <a:avLst/>
+          </a:prstGeom>
+          <a:noFill/>
+        </p:spPr>
+        <p:txBody>
+          <a:bodyPr wrap="square">
+            <a:spAutoFit/>
+          </a:bodyPr>
+          <a:lstStyle/>
+          <a:p>
+            <a:r>
+              <a:rPr sz="2600" b="1">
+                <a:solidFill>
+                  <a:srgbClr val="0B3D2E"/>
+                </a:solidFill>
+              </a:rPr>
+              <a:t>🔗 Referencias</a:t>
+            </a:r>
+          </a:p>
+        </p:txBody>
+      </p:sp>
+      <p:sp>
+        <p:nvSpPr>
+          <p:cNvPr id="3" name="TextBox 2"/>
+          <p:cNvSpPr txBox="1"/>
+          <p:nvPr/>
+        </p:nvSpPr>
+        <p:spPr>
+          <a:xfrm>
+            <a:off x="457200" y="1280160"/>
+            <a:ext cx="8229600" cy="4937760"/>
+          </a:xfrm>
+          <a:prstGeom prst="rect">
+            <a:avLst/>
+          </a:prstGeom>
+          <a:noFill/>
+        </p:spPr>
+        <p:txBody>
+          <a:bodyPr wrap="square">
+            <a:spAutoFit/>
+          </a:bodyPr>
+          <a:lstStyle/>
+          <a:p>
+            <a:pPr>
+              <a:spcAft>
+                <a:spcPts val="600"/>
+              </a:spcAft>
+            </a:pPr>
+            <a:r>
+              <a:rPr sz="1500">
+                <a:solidFill>
+                  <a:srgbClr val="22282E"/>
+                </a:solidFill>
+              </a:rPr>
               <a:t>•  ISO/IEC 27001:2022. &lt;https://www.iso.org/standard/27001&gt;</a:t>
             </a:r>
           </a:p>
@@ -3629,6 +4080,81 @@
           </a:p>
         </p:txBody>
       </p:sp>
+    </p:spTree>
+  </p:cSld>
+  <p:clrMapOvr>
+    <a:masterClrMapping/>
+  </p:clrMapOvr>
+</p:sld>
+</file>
+
+<file path=ppt/slides/slide16.xml><?xml version="1.0" encoding="utf-8"?>
+<p:sld xmlns:a="http://schemas.openxmlformats.org/drawingml/2006/main" xmlns:p="http://schemas.openxmlformats.org/presentationml/2006/main" xmlns:r="http://schemas.openxmlformats.org/officeDocument/2006/relationships">
+  <p:cSld>
+    <p:spTree>
+      <p:nvGrpSpPr>
+        <p:cNvPr id="1" name=""/>
+        <p:cNvGrpSpPr/>
+        <p:nvPr/>
+      </p:nvGrpSpPr>
+      <p:grpSpPr/>
+      <p:sp>
+        <p:nvSpPr>
+          <p:cNvPr id="2" name="TextBox 1"/>
+          <p:cNvSpPr txBox="1"/>
+          <p:nvPr/>
+        </p:nvSpPr>
+        <p:spPr>
+          <a:xfrm>
+            <a:off x="457200" y="274320"/>
+            <a:ext cx="8229600" cy="640080"/>
+          </a:xfrm>
+          <a:prstGeom prst="rect">
+            <a:avLst/>
+          </a:prstGeom>
+          <a:noFill/>
+        </p:spPr>
+        <p:txBody>
+          <a:bodyPr wrap="square">
+            <a:spAutoFit/>
+          </a:bodyPr>
+          <a:lstStyle/>
+          <a:p>
+            <a:r>
+              <a:rPr sz="2200" b="1">
+                <a:solidFill>
+                  <a:srgbClr val="0B3D2E"/>
+                </a:solidFill>
+              </a:rPr>
+              <a:t>Diagrama de la clase</a:t>
+            </a:r>
+          </a:p>
+        </p:txBody>
+      </p:sp>
+      <p:pic>
+        <p:nvPicPr>
+          <p:cNvPr id="3" name="Picture 2" descr="95a4aa78c24bd85d.png"/>
+          <p:cNvPicPr>
+            <a:picLocks noChangeAspect="1"/>
+          </p:cNvPicPr>
+          <p:nvPr/>
+        </p:nvPicPr>
+        <p:blipFill>
+          <a:blip r:embed="rId2"/>
+          <a:stretch>
+            <a:fillRect/>
+          </a:stretch>
+        </p:blipFill>
+        <p:spPr>
+          <a:xfrm>
+            <a:off x="457200" y="3360420"/>
+            <a:ext cx="8229600" cy="777240"/>
+          </a:xfrm>
+          <a:prstGeom prst="rect">
+            <a:avLst/>
+          </a:prstGeom>
+        </p:spPr>
+      </p:pic>
     </p:spTree>
   </p:cSld>
   <p:clrMapOvr>
@@ -3713,7 +4239,7 @@
                   <a:srgbClr val="22282E"/>
                 </a:solidFill>
               </a:rPr>
-              <a:t>•  Entender qué es un Sistema de Gestión de Seguridad de la Información (SGSI) y cómo se implanta según ISO/IEC 27001:2022, la norma internacional certificable más extendida. Al terminar sabrás recorrer el ciclo PDCA, elaborar una Declaración de Aplicabilidad (SoA), gestionar el riesgo conforme a la norma y preparar una organización para auditoría de certificación.</a:t>
+              <a:t>•  Entender qué es un Sistema de Gestión de Seguridad de la Información (SGSI) y cómo se implanta según ISO/IEC 27001:2022, la norma internacional certificable más extendida. Al terminar sabrás recorrer…</a:t>
             </a:r>
           </a:p>
         </p:txBody>
@@ -4107,7 +4633,7 @@
                   <a:srgbClr val="0B3D2E"/>
                 </a:solidFill>
               </a:rPr>
-              <a:t>📖 Definiciones y características</a:t>
+              <a:t>🧠 Explicación en profundidad</a:t>
             </a:r>
           </a:p>
         </p:txBody>
@@ -4145,97 +4671,22 @@
                   <a:srgbClr val="22282E"/>
                 </a:solidFill>
               </a:rPr>
-              <a:t>•  SGSI: sistema de gestión que establece, implementa, mantiene y mejora la seguridad de la información. Clave: es un sistema de gestión, no un producto.</a:t>
-            </a:r>
-          </a:p>
-          <a:p>
-            <a:pPr>
-              <a:spcAft>
-                <a:spcPts val="600"/>
-              </a:spcAft>
-            </a:pPr>
-            <a:r>
-              <a:rPr sz="1500">
-                <a:solidFill>
-                  <a:srgbClr val="22282E"/>
-                </a:solidFill>
-              </a:rPr>
-              <a:t>•  ISO/IEC 27001: norma certificable con los requisitos del SGSI (cláusulas 4–10). Clave: lo obligatorio se expresa con "debe".</a:t>
-            </a:r>
-          </a:p>
-          <a:p>
-            <a:pPr>
-              <a:spcAft>
-                <a:spcPts val="600"/>
-              </a:spcAft>
-            </a:pPr>
-            <a:r>
-              <a:rPr sz="1500">
-                <a:solidFill>
-                  <a:srgbClr val="22282E"/>
-                </a:solidFill>
-              </a:rPr>
-              <a:t>•  ISO/IEC 27002: guía de implementación de los controles del Anexo A. Clave: no es certificable, es orientativa.</a:t>
-            </a:r>
-          </a:p>
-          <a:p>
-            <a:pPr>
-              <a:spcAft>
-                <a:spcPts val="600"/>
-              </a:spcAft>
-            </a:pPr>
-            <a:r>
-              <a:rPr sz="1500">
-                <a:solidFill>
-                  <a:srgbClr val="22282E"/>
-                </a:solidFill>
-              </a:rPr>
-              <a:t>•  Anexo A (2022): 93 controles agrupados en 4 temas (Organizacional, Personas, Físico, Tecnológico). Clave: reemplazó los 114 controles/14 dominios de 2013.</a:t>
-            </a:r>
-          </a:p>
-          <a:p>
-            <a:pPr>
-              <a:spcAft>
-                <a:spcPts val="600"/>
-              </a:spcAft>
-            </a:pPr>
-            <a:r>
-              <a:rPr sz="1500">
-                <a:solidFill>
-                  <a:srgbClr val="22282E"/>
-                </a:solidFill>
-              </a:rPr>
-              <a:t>•  SoA (Statement of Applicability): documento que lista qué controles aplican, cuáles no y por qué. Clave: pieza obligatoria y auditada.</a:t>
-            </a:r>
-          </a:p>
-          <a:p>
-            <a:pPr>
-              <a:spcAft>
-                <a:spcPts val="600"/>
-              </a:spcAft>
-            </a:pPr>
-            <a:r>
-              <a:rPr sz="1500">
-                <a:solidFill>
-                  <a:srgbClr val="22282E"/>
-                </a:solidFill>
-              </a:rPr>
-              <a:t>•  PDCA: Plan-Do-Check-Act, el motor de mejora continua. Clave: la certificación exige evidencia de las 4 fases.</a:t>
-            </a:r>
-          </a:p>
-          <a:p>
-            <a:pPr>
-              <a:spcAft>
-                <a:spcPts val="600"/>
-              </a:spcAft>
-            </a:pPr>
-            <a:r>
-              <a:rPr sz="1500">
-                <a:solidFill>
-                  <a:srgbClr val="22282E"/>
-                </a:solidFill>
-              </a:rPr>
-              <a:t>•  No conformidad: incumplimiento de un requisito; mayor o menor. Clave: una mayor bloquea la certificación hasta corregirla.</a:t>
+              <a:t>•  ISO/IEC 27001 especifica requisitos para un sistema de gestión, no una lista universal de controles técnicos. La organización define contexto, partes interesadas, alcance y criterios; evalúa riesgos…</a:t>
+            </a:r>
+          </a:p>
+          <a:p>
+            <a:pPr>
+              <a:spcAft>
+                <a:spcPts val="600"/>
+              </a:spcAft>
+            </a:pPr>
+            <a:r>
+              <a:rPr sz="1500">
+                <a:solidFill>
+                  <a:srgbClr val="22282E"/>
+                </a:solidFill>
+              </a:rPr>
+              <a:t>•  Una empresa copia 93 controles y declara todos aplicables. No puede explicar qué riesgo trata cada uno. Rehace el alcance, enlaza controles con tratamiento y conserva responsables y evidencia; el…</a:t>
             </a:r>
           </a:p>
         </p:txBody>
@@ -4286,7 +4737,7 @@
                   <a:srgbClr val="0B3D2E"/>
                 </a:solidFill>
               </a:rPr>
-              <a:t>🧰 Herramientas y preparación</a:t>
+              <a:t>📔 Glosario operativo</a:t>
             </a:r>
           </a:p>
         </p:txBody>
@@ -4324,67 +4775,52 @@
                   <a:srgbClr val="22282E"/>
                 </a:solidFill>
               </a:rPr>
-              <a:t>•  Editor de documentos y hoja de cálculo para el SoA y el registro de riesgos.</a:t>
-            </a:r>
-          </a:p>
-          <a:p>
-            <a:pPr>
-              <a:spcAft>
-                <a:spcPts val="600"/>
-              </a:spcAft>
-            </a:pPr>
-            <a:r>
-              <a:rPr sz="1500">
-                <a:solidFill>
-                  <a:srgbClr val="22282E"/>
-                </a:solidFill>
-              </a:rPr>
-              <a:t>•  El índice de ISO/IEC 27001:2022 (puedes consultar la estructura pública; el texto íntegro es de pago en iso.org).</a:t>
-            </a:r>
-          </a:p>
-          <a:p>
-            <a:pPr>
-              <a:spcAft>
-                <a:spcPts val="600"/>
-              </a:spcAft>
-            </a:pPr>
-            <a:r>
-              <a:rPr sz="1500">
-                <a:solidFill>
-                  <a:srgbClr val="22282E"/>
-                </a:solidFill>
-              </a:rPr>
-              <a:t>•  Referencia de controles: ISO/IEC 27002:2022 para descripciones.</a:t>
-            </a:r>
-          </a:p>
-          <a:p>
-            <a:pPr>
-              <a:spcAft>
-                <a:spcPts val="600"/>
-              </a:spcAft>
-            </a:pPr>
-            <a:r>
-              <a:rPr sz="1500">
-                <a:solidFill>
-                  <a:srgbClr val="22282E"/>
-                </a:solidFill>
-              </a:rPr>
-              <a:t>•  Opcional: plantillas abiertas de SoA (busca "ISO 27001 SoA template") como referencia estructural, sin copiar contenido.</a:t>
-            </a:r>
-          </a:p>
-          <a:p>
-            <a:pPr>
-              <a:spcAft>
-                <a:spcPts val="600"/>
-              </a:spcAft>
-            </a:pPr>
-            <a:r>
-              <a:rPr sz="1500">
-                <a:solidFill>
-                  <a:srgbClr val="22282E"/>
-                </a:solidFill>
-              </a:rPr>
-              <a:t>•  Herramientas GRC opcionales para gestionar evidencia: Eramba (open source), o simples carpetas versionadas.</a:t>
+              <a:t>•  Término — Definición</a:t>
+            </a:r>
+          </a:p>
+          <a:p>
+            <a:pPr>
+              <a:spcAft>
+                <a:spcPts val="600"/>
+              </a:spcAft>
+            </a:pPr>
+            <a:r>
+              <a:rPr sz="1500">
+                <a:solidFill>
+                  <a:srgbClr val="22282E"/>
+                </a:solidFill>
+              </a:rPr>
+              <a:t>•  SGSI — Sistema de gestión para dirigir y mejorar seguridad de información.</a:t>
+            </a:r>
+          </a:p>
+          <a:p>
+            <a:pPr>
+              <a:spcAft>
+                <a:spcPts val="600"/>
+              </a:spcAft>
+            </a:pPr>
+            <a:r>
+              <a:rPr sz="1500">
+                <a:solidFill>
+                  <a:srgbClr val="22282E"/>
+                </a:solidFill>
+              </a:rPr>
+              <a:t>•  SoA — Declaración que justifica controles aplicables y su estado.</a:t>
+            </a:r>
+          </a:p>
+          <a:p>
+            <a:pPr>
+              <a:spcAft>
+                <a:spcPts val="600"/>
+              </a:spcAft>
+            </a:pPr>
+            <a:r>
+              <a:rPr sz="1500">
+                <a:solidFill>
+                  <a:srgbClr val="22282E"/>
+                </a:solidFill>
+              </a:rPr>
+              <a:t>•  Alcance — Frontera organizativa, tecnológica y física del SGSI.</a:t>
             </a:r>
           </a:p>
         </p:txBody>
@@ -4435,7 +4871,7 @@
                   <a:srgbClr val="0B3D2E"/>
                 </a:solidFill>
               </a:rPr>
-              <a:t>🧪 Laboratorio guiado (ejercicio aplicado)</a:t>
+              <a:t>✅ Criterio de dominio</a:t>
             </a:r>
           </a:p>
         </p:txBody>
@@ -4473,97 +4909,7 @@
                   <a:srgbClr val="22282E"/>
                 </a:solidFill>
               </a:rPr>
-              <a:t>•  Vas a preparar los documentos núcleo del SGSI de "Ferretería del Sur S.A.".</a:t>
-            </a:r>
-          </a:p>
-          <a:p>
-            <a:pPr>
-              <a:spcAft>
-                <a:spcPts val="600"/>
-              </a:spcAft>
-            </a:pPr>
-            <a:r>
-              <a:rPr sz="1500">
-                <a:solidFill>
-                  <a:srgbClr val="22282E"/>
-                </a:solidFill>
-              </a:rPr>
-              <a:t>•  Alcance: redacta en un párrafo el alcance del SGSI (p. ej. "la plataforma de e-commerce, su infraestructura cloud y el proceso de pagos"). Indica qué queda fuera.</a:t>
-            </a:r>
-          </a:p>
-          <a:p>
-            <a:pPr>
-              <a:spcAft>
-                <a:spcPts val="600"/>
-              </a:spcAft>
-            </a:pPr>
-            <a:r>
-              <a:rPr sz="1500">
-                <a:solidFill>
-                  <a:srgbClr val="22282E"/>
-                </a:solidFill>
-              </a:rPr>
-              <a:t>•  Contexto y partes interesadas (cláusula 4): lista 5 partes interesadas (clientes, banco adquirente, reguladores, empleados, proveedores cloud) y sus expectativas de seguridad.</a:t>
-            </a:r>
-          </a:p>
-          <a:p>
-            <a:pPr>
-              <a:spcAft>
-                <a:spcPts val="600"/>
-              </a:spcAft>
-            </a:pPr>
-            <a:r>
-              <a:rPr sz="1500">
-                <a:solidFill>
-                  <a:srgbClr val="22282E"/>
-                </a:solidFill>
-              </a:rPr>
-              <a:t>•  Liderazgo (cláusula 5): redacta el compromiso de dirección en 3 frases y asigna el propietario del SGSI.</a:t>
-            </a:r>
-          </a:p>
-          <a:p>
-            <a:pPr>
-              <a:spcAft>
-                <a:spcPts val="600"/>
-              </a:spcAft>
-            </a:pPr>
-            <a:r>
-              <a:rPr sz="1500">
-                <a:solidFill>
-                  <a:srgbClr val="22282E"/>
-                </a:solidFill>
-              </a:rPr>
-              <a:t>•  Registro de riesgos (cláusula 6): reutiliza los 3 riesgos de la clase 277 en una hoja con: activo, amenaza, probabilidad, impacto, nivel y tratamiento.</a:t>
-            </a:r>
-          </a:p>
-          <a:p>
-            <a:pPr>
-              <a:spcAft>
-                <a:spcPts val="600"/>
-              </a:spcAft>
-            </a:pPr>
-            <a:r>
-              <a:rPr sz="1500">
-                <a:solidFill>
-                  <a:srgbClr val="22282E"/>
-                </a:solidFill>
-              </a:rPr>
-              <a:t>•  Selección de controles: para cada riesgo, elige controles del Anexo A (p. ej. A.5.7 Inteligencia de amenazas, A.8.7 Protección contra malware, A.8.13 Copias de seguridad).</a:t>
-            </a:r>
-          </a:p>
-          <a:p>
-            <a:pPr>
-              <a:spcAft>
-                <a:spcPts val="600"/>
-              </a:spcAft>
-            </a:pPr>
-            <a:r>
-              <a:rPr sz="1500">
-                <a:solidFill>
-                  <a:srgbClr val="22282E"/>
-                </a:solidFill>
-              </a:rPr>
-              <a:t>•  Declaración de Aplicabilidad: crea una hoja con las columnas: control, aplica (Sí/No), justificación, estado de implementación. Rellena al menos 15 controles, incluyendo alguna exclusión justificada (p. ej. A.7.x físico si todo es cloud).</a:t>
+              <a:t>•  El alumno puede construir la cadena contexto–riesgo–tratamiento–SoA–evidencia y explicar los límites de certificación.</a:t>
             </a:r>
           </a:p>
         </p:txBody>
@@ -4614,7 +4960,7 @@
                   <a:srgbClr val="0B3D2E"/>
                 </a:solidFill>
               </a:rPr>
-              <a:t>✍️ Ejercicios</a:t>
+              <a:t>📖 Definiciones y características</a:t>
             </a:r>
           </a:p>
         </p:txBody>
@@ -4652,82 +4998,97 @@
                   <a:srgbClr val="22282E"/>
                 </a:solidFill>
               </a:rPr>
-              <a:t>•  Explica la diferencia entre ISO 27001 e ISO 27002.</a:t>
-            </a:r>
-          </a:p>
-          <a:p>
-            <a:pPr>
-              <a:spcAft>
-                <a:spcPts val="600"/>
-              </a:spcAft>
-            </a:pPr>
-            <a:r>
-              <a:rPr sz="1500">
-                <a:solidFill>
-                  <a:srgbClr val="22282E"/>
-                </a:solidFill>
-              </a:rPr>
-              <a:t>•  ¿Por qué el SoA es obligatorio y qué pasa si excluyes un control sin justificarlo?</a:t>
-            </a:r>
-          </a:p>
-          <a:p>
-            <a:pPr>
-              <a:spcAft>
-                <a:spcPts val="600"/>
-              </a:spcAft>
-            </a:pPr>
-            <a:r>
-              <a:rPr sz="1500">
-                <a:solidFill>
-                  <a:srgbClr val="22282E"/>
-                </a:solidFill>
-              </a:rPr>
-              <a:t>•  Mapea estos riesgos a controles del Anexo A: phishing, pérdida de laptop, acceso no revocado a un ex-empleado.</a:t>
-            </a:r>
-          </a:p>
-          <a:p>
-            <a:pPr>
-              <a:spcAft>
-                <a:spcPts val="600"/>
-              </a:spcAft>
-            </a:pPr>
-            <a:r>
-              <a:rPr sz="1500">
-                <a:solidFill>
-                  <a:srgbClr val="22282E"/>
-                </a:solidFill>
-              </a:rPr>
-              <a:t>•  Redacta una política de seguridad de la información conforme a la cláusula 5.2 (máx. 15 líneas).</a:t>
-            </a:r>
-          </a:p>
-          <a:p>
-            <a:pPr>
-              <a:spcAft>
-                <a:spcPts val="600"/>
-              </a:spcAft>
-            </a:pPr>
-            <a:r>
-              <a:rPr sz="1500">
-                <a:solidFill>
-                  <a:srgbClr val="22282E"/>
-                </a:solidFill>
-              </a:rPr>
-              <a:t>•  Distingue una no conformidad mayor de una menor con un ejemplo de cada.</a:t>
-            </a:r>
-          </a:p>
-          <a:p>
-            <a:pPr>
-              <a:spcAft>
-                <a:spcPts val="600"/>
-              </a:spcAft>
-            </a:pPr>
-            <a:r>
-              <a:rPr sz="1500">
-                <a:solidFill>
-                  <a:srgbClr val="22282E"/>
-                </a:solidFill>
-              </a:rPr>
-              <a:t>•  Describe qué se revisa en la etapa 1 vs. la etapa 2 de la auditoría de certificación.</a:t>
+              <a:t>•  SGSI: sistema de gestión que establece, implementa, mantiene y mejora la seguridad de la información. Clave: es un sistema de gestión, no un producto.</a:t>
+            </a:r>
+          </a:p>
+          <a:p>
+            <a:pPr>
+              <a:spcAft>
+                <a:spcPts val="600"/>
+              </a:spcAft>
+            </a:pPr>
+            <a:r>
+              <a:rPr sz="1500">
+                <a:solidFill>
+                  <a:srgbClr val="22282E"/>
+                </a:solidFill>
+              </a:rPr>
+              <a:t>•  ISO/IEC 27001: norma certificable con los requisitos del SGSI (cláusulas 4–10). Clave: lo obligatorio se expresa con "debe".</a:t>
+            </a:r>
+          </a:p>
+          <a:p>
+            <a:pPr>
+              <a:spcAft>
+                <a:spcPts val="600"/>
+              </a:spcAft>
+            </a:pPr>
+            <a:r>
+              <a:rPr sz="1500">
+                <a:solidFill>
+                  <a:srgbClr val="22282E"/>
+                </a:solidFill>
+              </a:rPr>
+              <a:t>•  ISO/IEC 27002: guía de implementación de los controles del Anexo A. Clave: no es certificable, es orientativa.</a:t>
+            </a:r>
+          </a:p>
+          <a:p>
+            <a:pPr>
+              <a:spcAft>
+                <a:spcPts val="600"/>
+              </a:spcAft>
+            </a:pPr>
+            <a:r>
+              <a:rPr sz="1500">
+                <a:solidFill>
+                  <a:srgbClr val="22282E"/>
+                </a:solidFill>
+              </a:rPr>
+              <a:t>•  Anexo A (2022): 93 controles agrupados en 4 temas (Organizacional, Personas, Físico, Tecnológico). Clave: reemplazó los 114 controles/14 dominios de 2013.</a:t>
+            </a:r>
+          </a:p>
+          <a:p>
+            <a:pPr>
+              <a:spcAft>
+                <a:spcPts val="600"/>
+              </a:spcAft>
+            </a:pPr>
+            <a:r>
+              <a:rPr sz="1500">
+                <a:solidFill>
+                  <a:srgbClr val="22282E"/>
+                </a:solidFill>
+              </a:rPr>
+              <a:t>•  SoA (Statement of Applicability): documento que lista qué controles aplican, cuáles no y por qué. Clave: pieza obligatoria y auditada.</a:t>
+            </a:r>
+          </a:p>
+          <a:p>
+            <a:pPr>
+              <a:spcAft>
+                <a:spcPts val="600"/>
+              </a:spcAft>
+            </a:pPr>
+            <a:r>
+              <a:rPr sz="1500">
+                <a:solidFill>
+                  <a:srgbClr val="22282E"/>
+                </a:solidFill>
+              </a:rPr>
+              <a:t>•  PDCA: Plan-Do-Check-Act, el motor de mejora continua. Clave: la certificación exige evidencia de las 4 fases.</a:t>
+            </a:r>
+          </a:p>
+          <a:p>
+            <a:pPr>
+              <a:spcAft>
+                <a:spcPts val="600"/>
+              </a:spcAft>
+            </a:pPr>
+            <a:r>
+              <a:rPr sz="1500">
+                <a:solidFill>
+                  <a:srgbClr val="22282E"/>
+                </a:solidFill>
+              </a:rPr>
+              <a:t>•  No conformidad: incumplimiento de un requisito; mayor o menor. Clave: una mayor bloquea la certificación hasta corregirla.</a:t>
             </a:r>
           </a:p>
         </p:txBody>
@@ -4778,7 +5139,7 @@
                   <a:srgbClr val="0B3D2E"/>
                 </a:solidFill>
               </a:rPr>
-              <a:t>📝 Reto verificable</a:t>
+              <a:t>🧰 Herramientas y preparación</a:t>
             </a:r>
           </a:p>
         </p:txBody>
@@ -4816,22 +5177,67 @@
                   <a:srgbClr val="22282E"/>
                 </a:solidFill>
               </a:rPr>
-              <a:t>•  Entrega una Declaración de Aplicabilidad (SoA) con al menos 20 controles del Anexo A:2022, cada uno marcado como aplicable/no aplicable, con justificación y estado, acompañada del registro de riesgos que la sustenta.</a:t>
-            </a:r>
-          </a:p>
-          <a:p>
-            <a:pPr>
-              <a:spcAft>
-                <a:spcPts val="600"/>
-              </a:spcAft>
-            </a:pPr>
-            <a:r>
-              <a:rPr sz="1500">
-                <a:solidFill>
-                  <a:srgbClr val="22282E"/>
-                </a:solidFill>
-              </a:rPr>
-              <a:t>•  Criterio de aceptación: cada control incluye justificación (no solo "Sí/No"), hay al menos una exclusión razonada, y cada control aplicable está trazado a un riesgo del registro.</a:t>
+              <a:t>•  Editor de documentos y hoja de cálculo para el SoA y el registro de riesgos.</a:t>
+            </a:r>
+          </a:p>
+          <a:p>
+            <a:pPr>
+              <a:spcAft>
+                <a:spcPts val="600"/>
+              </a:spcAft>
+            </a:pPr>
+            <a:r>
+              <a:rPr sz="1500">
+                <a:solidFill>
+                  <a:srgbClr val="22282E"/>
+                </a:solidFill>
+              </a:rPr>
+              <a:t>•  El índice de ISO/IEC 27001:2022 (puedes consultar la estructura pública; el texto íntegro es de pago en iso.org).</a:t>
+            </a:r>
+          </a:p>
+          <a:p>
+            <a:pPr>
+              <a:spcAft>
+                <a:spcPts val="600"/>
+              </a:spcAft>
+            </a:pPr>
+            <a:r>
+              <a:rPr sz="1500">
+                <a:solidFill>
+                  <a:srgbClr val="22282E"/>
+                </a:solidFill>
+              </a:rPr>
+              <a:t>•  Referencia de controles: ISO/IEC 27002:2022 para descripciones.</a:t>
+            </a:r>
+          </a:p>
+          <a:p>
+            <a:pPr>
+              <a:spcAft>
+                <a:spcPts val="600"/>
+              </a:spcAft>
+            </a:pPr>
+            <a:r>
+              <a:rPr sz="1500">
+                <a:solidFill>
+                  <a:srgbClr val="22282E"/>
+                </a:solidFill>
+              </a:rPr>
+              <a:t>•  Opcional: plantillas abiertas de SoA (busca "ISO 27001 SoA template") como referencia estructural, sin copiar contenido.</a:t>
+            </a:r>
+          </a:p>
+          <a:p>
+            <a:pPr>
+              <a:spcAft>
+                <a:spcPts val="600"/>
+              </a:spcAft>
+            </a:pPr>
+            <a:r>
+              <a:rPr sz="1500">
+                <a:solidFill>
+                  <a:srgbClr val="22282E"/>
+                </a:solidFill>
+              </a:rPr>
+              <a:t>•  Herramientas GRC opcionales para gestionar evidencia: Eramba (open source), o simples carpetas versionadas.</a:t>
             </a:r>
           </a:p>
         </p:txBody>
